--- a/decks/output/08-kente-executive-design-v0.pptx
+++ b/decks/output/08-kente-executive-design-v0.pptx
@@ -20,7 +20,6 @@
     <p:sldId id="268" r:id="rId19"/>
     <p:sldId id="269" r:id="rId20"/>
     <p:sldId id="270" r:id="rId21"/>
-    <p:sldId id="271" r:id="rId22"/>
   </p:sldIdLst>
   <p:sldSz cx="12192000" cy="6858000" type="screen4x3"/>
   <p:notesSz cx="6858000" cy="9144000"/>
@@ -3368,8 +3367,8 @@
         </p:nvSpPr>
         <p:spPr>
           <a:xfrm>
-            <a:off x="800000" y="500000"/>
-            <a:ext cx="10500000" cy="700000"/>
+            <a:off x="1200000" y="2200000"/>
+            <a:ext cx="9700000" cy="1500000"/>
           </a:xfrm>
           <a:prstGeom prst="rect">
             <a:avLst/>
@@ -3382,73 +3381,43 @@
           </a:bodyPr>
           <a:lstStyle/>
           <a:p>
-            <a:pPr algn="l"/>
-            <a:r>
-              <a:rPr sz="3200" b="1">
+            <a:pPr algn="ctr"/>
+            <a:r>
+              <a:rPr sz="4400" b="1">
                 <a:solidFill>
                   <a:srgbClr val="0E1411"/>
                 </a:solidFill>
-                <a:latin typeface="DM Sans"/>
+                <a:latin typeface="Playfair Display"/>
               </a:rPr>
-              <a:t>Distinct PWA icons — the same idea on a phone</a:t>
-            </a:r>
-          </a:p>
-        </p:txBody>
-      </p:sp>
-      <p:sp>
-        <p:nvSpPr>
-          <p:cNvPr id="3" name="Rectangle 2"/>
-          <p:cNvSpPr/>
-          <p:nvPr/>
-        </p:nvSpPr>
-        <p:spPr>
-          <a:xfrm>
-            <a:off x="800000" y="1500000"/>
-            <a:ext cx="5800000" cy="4500000"/>
-          </a:xfrm>
-          <a:prstGeom prst="rect">
-            <a:avLst/>
-          </a:prstGeom>
-          <a:solidFill>
-            <a:srgbClr val="FBF7EF"/>
-          </a:solidFill>
-          <a:ln>
-            <a:solidFill>
-              <a:srgbClr val="D8CFBE"/>
-            </a:solidFill>
-          </a:ln>
-        </p:spPr>
-        <p:style>
-          <a:lnRef idx="1">
-            <a:schemeClr val="accent1"/>
-          </a:lnRef>
-          <a:fillRef idx="3">
-            <a:schemeClr val="accent1"/>
-          </a:fillRef>
-          <a:effectRef idx="2">
-            <a:schemeClr val="accent1"/>
-          </a:effectRef>
-          <a:fontRef idx="minor">
-            <a:schemeClr val="lt1"/>
-          </a:fontRef>
-        </p:style>
-        <p:txBody>
-          <a:bodyPr rtlCol="0" anchor="ctr"/>
-          <a:lstStyle/>
-          <a:p>
-            <a:pPr algn="ctr"/>
-            <a:r>
-              <a:rPr sz="1100">
-                <a:solidFill>
-                  <a:srgbClr val="8B6B22"/>
-                </a:solidFill>
-                <a:latin typeface="DM Sans"/>
-              </a:rPr>
-              <a:t>[REPLACE: S24-home-screen-icons.png]</a:t>
-            </a:r>
-          </a:p>
-        </p:txBody>
-      </p:sp>
+              <a:t>Motion has meaning.</a:t>
+            </a:r>
+          </a:p>
+        </p:txBody>
+      </p:sp>
+      <p:pic>
+        <p:nvPicPr>
+          <p:cNvPr id="3" name="Picture 2" descr="gold-deco-hairline.png"/>
+          <p:cNvPicPr>
+            <a:picLocks noChangeAspect="1"/>
+          </p:cNvPicPr>
+          <p:nvPr/>
+        </p:nvPicPr>
+        <p:blipFill>
+          <a:blip r:embed="rId2"/>
+          <a:stretch>
+            <a:fillRect/>
+          </a:stretch>
+        </p:blipFill>
+        <p:spPr>
+          <a:xfrm>
+            <a:off x="5896000" y="3800000"/>
+            <a:ext cx="400000" cy="20000"/>
+          </a:xfrm>
+          <a:prstGeom prst="rect">
+            <a:avLst/>
+          </a:prstGeom>
+        </p:spPr>
+      </p:pic>
       <p:sp>
         <p:nvSpPr>
           <p:cNvPr id="4" name="TextBox 3"/>
@@ -3457,8 +3426,8 @@
         </p:nvSpPr>
         <p:spPr>
           <a:xfrm>
-            <a:off x="7100000" y="1500000"/>
-            <a:ext cx="4200000" cy="1100000"/>
+            <a:off x="1500000" y="4100000"/>
+            <a:ext cx="9100000" cy="1200000"/>
           </a:xfrm>
           <a:prstGeom prst="rect">
             <a:avLst/>
@@ -3471,15 +3440,15 @@
           </a:bodyPr>
           <a:lstStyle/>
           <a:p>
-            <a:pPr algn="l"/>
-            <a:r>
-              <a:rPr sz="1600" b="0">
+            <a:pPr algn="ctr"/>
+            <a:r>
+              <a:rPr sz="2200" b="0">
                 <a:solidFill>
                   <a:srgbClr val="1A1714"/>
                 </a:solidFill>
                 <a:latin typeface="DM Sans"/>
               </a:rPr>
-              <a:t>①  Green clock badge for Staff Attendance.</a:t>
+              <a:t>Rotating logo ring, magnetic-hover clock buttons, gold confetti on success. Respects prefers-reduced-motion.</a:t>
             </a:r>
           </a:p>
         </p:txBody>
@@ -3492,8 +3461,8 @@
         </p:nvSpPr>
         <p:spPr>
           <a:xfrm>
-            <a:off x="7100000" y="2800000"/>
-            <a:ext cx="4200000" cy="1100000"/>
+            <a:off x="8000000" y="6500000"/>
+            <a:ext cx="4000000" cy="300000"/>
           </a:xfrm>
           <a:prstGeom prst="rect">
             <a:avLst/>
@@ -3506,120 +3475,15 @@
           </a:bodyPr>
           <a:lstStyle/>
           <a:p>
-            <a:pPr algn="l"/>
-            <a:r>
-              <a:rPr sz="1600" b="0">
-                <a:solidFill>
-                  <a:srgbClr val="1A1714"/>
+            <a:pPr algn="r"/>
+            <a:r>
+              <a:rPr sz="1100" b="0">
+                <a:solidFill>
+                  <a:srgbClr val="D8CFBE"/>
                 </a:solidFill>
                 <a:latin typeface="DM Sans"/>
               </a:rPr>
-              <a:t>②  Gold user-plus badge for SmartGate.</a:t>
-            </a:r>
-          </a:p>
-        </p:txBody>
-      </p:sp>
-      <p:sp>
-        <p:nvSpPr>
-          <p:cNvPr id="6" name="TextBox 5"/>
-          <p:cNvSpPr txBox="1"/>
-          <p:nvPr/>
-        </p:nvSpPr>
-        <p:spPr>
-          <a:xfrm>
-            <a:off x="7100000" y="4100000"/>
-            <a:ext cx="4200000" cy="1100000"/>
-          </a:xfrm>
-          <a:prstGeom prst="rect">
-            <a:avLst/>
-          </a:prstGeom>
-          <a:noFill/>
-        </p:spPr>
-        <p:txBody>
-          <a:bodyPr wrap="square">
-            <a:spAutoFit/>
-          </a:bodyPr>
-          <a:lstStyle/>
-          <a:p>
-            <a:pPr algn="l"/>
-            <a:r>
-              <a:rPr sz="1600" b="0">
-                <a:solidFill>
-                  <a:srgbClr val="1A1714"/>
-                </a:solidFill>
-                <a:latin typeface="DM Sans"/>
-              </a:rPr>
-              <a:t>③  The brand crosses from PPTX to home screen.</a:t>
-            </a:r>
-          </a:p>
-        </p:txBody>
-      </p:sp>
-      <p:sp>
-        <p:nvSpPr>
-          <p:cNvPr id="7" name="TextBox 6"/>
-          <p:cNvSpPr txBox="1"/>
-          <p:nvPr/>
-        </p:nvSpPr>
-        <p:spPr>
-          <a:xfrm>
-            <a:off x="800000" y="6100000"/>
-            <a:ext cx="10500000" cy="300000"/>
-          </a:xfrm>
-          <a:prstGeom prst="rect">
-            <a:avLst/>
-          </a:prstGeom>
-          <a:noFill/>
-        </p:spPr>
-        <p:txBody>
-          <a:bodyPr wrap="square">
-            <a:spAutoFit/>
-          </a:bodyPr>
-          <a:lstStyle/>
-          <a:p>
-            <a:pPr algn="l"/>
-            <a:r>
-              <a:rPr sz="1100" b="0">
-                <a:solidFill>
-                  <a:srgbClr val="8B6B22"/>
-                </a:solidFill>
-                <a:latin typeface="DM Sans"/>
-              </a:rPr>
-              <a:t>iOS home screen, both apps installed.</a:t>
-            </a:r>
-          </a:p>
-        </p:txBody>
-      </p:sp>
-      <p:sp>
-        <p:nvSpPr>
-          <p:cNvPr id="8" name="TextBox 7"/>
-          <p:cNvSpPr txBox="1"/>
-          <p:nvPr/>
-        </p:nvSpPr>
-        <p:spPr>
-          <a:xfrm>
-            <a:off x="8000000" y="6500000"/>
-            <a:ext cx="4000000" cy="300000"/>
-          </a:xfrm>
-          <a:prstGeom prst="rect">
-            <a:avLst/>
-          </a:prstGeom>
-          <a:noFill/>
-        </p:spPr>
-        <p:txBody>
-          <a:bodyPr wrap="square">
-            <a:spAutoFit/>
-          </a:bodyPr>
-          <a:lstStyle/>
-          <a:p>
-            <a:pPr algn="r"/>
-            <a:r>
-              <a:rPr sz="1100" b="0">
-                <a:solidFill>
-                  <a:srgbClr val="D8CFBE"/>
-                </a:solidFill>
-                <a:latin typeface="DM Sans"/>
-              </a:rPr>
-              <a:t>08 · Kente Executive Design · 10/16</a:t>
+              <a:t>08 · Kente Executive Design · 10/15</a:t>
             </a:r>
           </a:p>
         </p:txBody>
@@ -3658,8 +3522,8 @@
         </p:nvSpPr>
         <p:spPr>
           <a:xfrm>
-            <a:off x="1200000" y="2200000"/>
-            <a:ext cx="9700000" cy="1500000"/>
+            <a:off x="800000" y="500000"/>
+            <a:ext cx="10500000" cy="700000"/>
           </a:xfrm>
           <a:prstGeom prst="rect">
             <a:avLst/>
@@ -3672,43 +3536,73 @@
           </a:bodyPr>
           <a:lstStyle/>
           <a:p>
+            <a:pPr algn="l"/>
+            <a:r>
+              <a:rPr sz="3200" b="1">
+                <a:solidFill>
+                  <a:srgbClr val="0E1411"/>
+                </a:solidFill>
+                <a:latin typeface="DM Sans"/>
+              </a:rPr>
+              <a:t>Confetti on successful clock-in</a:t>
+            </a:r>
+          </a:p>
+        </p:txBody>
+      </p:sp>
+      <p:sp>
+        <p:nvSpPr>
+          <p:cNvPr id="3" name="Rectangle 2"/>
+          <p:cNvSpPr/>
+          <p:nvPr/>
+        </p:nvSpPr>
+        <p:spPr>
+          <a:xfrm>
+            <a:off x="800000" y="1500000"/>
+            <a:ext cx="5800000" cy="4500000"/>
+          </a:xfrm>
+          <a:prstGeom prst="rect">
+            <a:avLst/>
+          </a:prstGeom>
+          <a:solidFill>
+            <a:srgbClr val="FBF7EF"/>
+          </a:solidFill>
+          <a:ln>
+            <a:solidFill>
+              <a:srgbClr val="D8CFBE"/>
+            </a:solidFill>
+          </a:ln>
+        </p:spPr>
+        <p:style>
+          <a:lnRef idx="1">
+            <a:schemeClr val="accent1"/>
+          </a:lnRef>
+          <a:fillRef idx="3">
+            <a:schemeClr val="accent1"/>
+          </a:fillRef>
+          <a:effectRef idx="2">
+            <a:schemeClr val="accent1"/>
+          </a:effectRef>
+          <a:fontRef idx="minor">
+            <a:schemeClr val="lt1"/>
+          </a:fontRef>
+        </p:style>
+        <p:txBody>
+          <a:bodyPr rtlCol="0" anchor="ctr"/>
+          <a:lstStyle/>
+          <a:p>
             <a:pPr algn="ctr"/>
             <a:r>
-              <a:rPr sz="4400" b="1">
-                <a:solidFill>
-                  <a:srgbClr val="0E1411"/>
-                </a:solidFill>
-                <a:latin typeface="Playfair Display"/>
+              <a:rPr sz="1100">
+                <a:solidFill>
+                  <a:srgbClr val="8B6B22"/>
+                </a:solidFill>
+                <a:latin typeface="DM Sans"/>
               </a:rPr>
-              <a:t>Motion has meaning.</a:t>
-            </a:r>
-          </a:p>
-        </p:txBody>
-      </p:sp>
-      <p:pic>
-        <p:nvPicPr>
-          <p:cNvPr id="3" name="Picture 2" descr="gold-deco-hairline.png"/>
-          <p:cNvPicPr>
-            <a:picLocks noChangeAspect="1"/>
-          </p:cNvPicPr>
-          <p:nvPr/>
-        </p:nvPicPr>
-        <p:blipFill>
-          <a:blip r:embed="rId2"/>
-          <a:stretch>
-            <a:fillRect/>
-          </a:stretch>
-        </p:blipFill>
-        <p:spPr>
-          <a:xfrm>
-            <a:off x="5896000" y="3800000"/>
-            <a:ext cx="400000" cy="20000"/>
-          </a:xfrm>
-          <a:prstGeom prst="rect">
-            <a:avLst/>
-          </a:prstGeom>
-        </p:spPr>
-      </p:pic>
+              <a:t>[REPLACE: S26-confetti-burst.png]</a:t>
+            </a:r>
+          </a:p>
+        </p:txBody>
+      </p:sp>
       <p:sp>
         <p:nvSpPr>
           <p:cNvPr id="4" name="TextBox 3"/>
@@ -3717,8 +3611,8 @@
         </p:nvSpPr>
         <p:spPr>
           <a:xfrm>
-            <a:off x="1500000" y="4100000"/>
-            <a:ext cx="9100000" cy="1200000"/>
+            <a:off x="7100000" y="1500000"/>
+            <a:ext cx="4200000" cy="1100000"/>
           </a:xfrm>
           <a:prstGeom prst="rect">
             <a:avLst/>
@@ -3731,15 +3625,15 @@
           </a:bodyPr>
           <a:lstStyle/>
           <a:p>
-            <a:pPr algn="ctr"/>
-            <a:r>
-              <a:rPr sz="2200" b="0">
+            <a:pPr algn="l"/>
+            <a:r>
+              <a:rPr sz="1600" b="0">
                 <a:solidFill>
                   <a:srgbClr val="1A1714"/>
                 </a:solidFill>
                 <a:latin typeface="DM Sans"/>
               </a:rPr>
-              <a:t>Rotating logo ring, magnetic-hover clock buttons, gold confetti on success. Respects prefers-reduced-motion.</a:t>
+              <a:t>①  Triggered on clock-in success only.</a:t>
             </a:r>
           </a:p>
         </p:txBody>
@@ -3752,8 +3646,8 @@
         </p:nvSpPr>
         <p:spPr>
           <a:xfrm>
-            <a:off x="8000000" y="6500000"/>
-            <a:ext cx="4000000" cy="300000"/>
+            <a:off x="7100000" y="2800000"/>
+            <a:ext cx="4200000" cy="1100000"/>
           </a:xfrm>
           <a:prstGeom prst="rect">
             <a:avLst/>
@@ -3766,15 +3660,120 @@
           </a:bodyPr>
           <a:lstStyle/>
           <a:p>
-            <a:pPr algn="r"/>
-            <a:r>
-              <a:rPr sz="1100" b="0">
-                <a:solidFill>
-                  <a:srgbClr val="D8CFBE"/>
+            <a:pPr algn="l"/>
+            <a:r>
+              <a:rPr sz="1600" b="0">
+                <a:solidFill>
+                  <a:srgbClr val="1A1714"/>
                 </a:solidFill>
                 <a:latin typeface="DM Sans"/>
               </a:rPr>
-              <a:t>08 · Kente Executive Design · 11/16</a:t>
+              <a:t>②  Gold particles, short duration.</a:t>
+            </a:r>
+          </a:p>
+        </p:txBody>
+      </p:sp>
+      <p:sp>
+        <p:nvSpPr>
+          <p:cNvPr id="6" name="TextBox 5"/>
+          <p:cNvSpPr txBox="1"/>
+          <p:nvPr/>
+        </p:nvSpPr>
+        <p:spPr>
+          <a:xfrm>
+            <a:off x="7100000" y="4100000"/>
+            <a:ext cx="4200000" cy="1100000"/>
+          </a:xfrm>
+          <a:prstGeom prst="rect">
+            <a:avLst/>
+          </a:prstGeom>
+          <a:noFill/>
+        </p:spPr>
+        <p:txBody>
+          <a:bodyPr wrap="square">
+            <a:spAutoFit/>
+          </a:bodyPr>
+          <a:lstStyle/>
+          <a:p>
+            <a:pPr algn="l"/>
+            <a:r>
+              <a:rPr sz="1600" b="0">
+                <a:solidFill>
+                  <a:srgbClr val="1A1714"/>
+                </a:solidFill>
+                <a:latin typeface="DM Sans"/>
+              </a:rPr>
+              <a:t>③  Disabled when reduced motion is on.</a:t>
+            </a:r>
+          </a:p>
+        </p:txBody>
+      </p:sp>
+      <p:sp>
+        <p:nvSpPr>
+          <p:cNvPr id="7" name="TextBox 6"/>
+          <p:cNvSpPr txBox="1"/>
+          <p:nvPr/>
+        </p:nvSpPr>
+        <p:spPr>
+          <a:xfrm>
+            <a:off x="800000" y="6100000"/>
+            <a:ext cx="10500000" cy="300000"/>
+          </a:xfrm>
+          <a:prstGeom prst="rect">
+            <a:avLst/>
+          </a:prstGeom>
+          <a:noFill/>
+        </p:spPr>
+        <p:txBody>
+          <a:bodyPr wrap="square">
+            <a:spAutoFit/>
+          </a:bodyPr>
+          <a:lstStyle/>
+          <a:p>
+            <a:pPr algn="l"/>
+            <a:r>
+              <a:rPr sz="1100" b="0">
+                <a:solidFill>
+                  <a:srgbClr val="8B6B22"/>
+                </a:solidFill>
+                <a:latin typeface="DM Sans"/>
+              </a:rPr>
+              <a:t>Clock page, post-success.</a:t>
+            </a:r>
+          </a:p>
+        </p:txBody>
+      </p:sp>
+      <p:sp>
+        <p:nvSpPr>
+          <p:cNvPr id="8" name="TextBox 7"/>
+          <p:cNvSpPr txBox="1"/>
+          <p:nvPr/>
+        </p:nvSpPr>
+        <p:spPr>
+          <a:xfrm>
+            <a:off x="8000000" y="6500000"/>
+            <a:ext cx="4000000" cy="300000"/>
+          </a:xfrm>
+          <a:prstGeom prst="rect">
+            <a:avLst/>
+          </a:prstGeom>
+          <a:noFill/>
+        </p:spPr>
+        <p:txBody>
+          <a:bodyPr wrap="square">
+            <a:spAutoFit/>
+          </a:bodyPr>
+          <a:lstStyle/>
+          <a:p>
+            <a:pPr algn="r"/>
+            <a:r>
+              <a:rPr sz="1100" b="0">
+                <a:solidFill>
+                  <a:srgbClr val="D8CFBE"/>
+                </a:solidFill>
+                <a:latin typeface="DM Sans"/>
+              </a:rPr>
+              <a:t>08 · Kente Executive Design · 11/15</a:t>
             </a:r>
           </a:p>
         </p:txBody>
@@ -3835,7 +3834,7 @@
                 </a:solidFill>
                 <a:latin typeface="DM Sans"/>
               </a:rPr>
-              <a:t>Confetti on successful clock-in</a:t>
+              <a:t>One sentence from the designer</a:t>
             </a:r>
           </a:p>
         </p:txBody>
@@ -3889,7 +3888,7 @@
                 </a:solidFill>
                 <a:latin typeface="DM Sans"/>
               </a:rPr>
-              <a:t>[REPLACE: S26-confetti-burst.png]</a:t>
+              <a:t>[REPLACE: S25-clock-page-hero.png]</a:t>
             </a:r>
           </a:p>
         </p:txBody>
@@ -3924,7 +3923,7 @@
                 </a:solidFill>
                 <a:latin typeface="DM Sans"/>
               </a:rPr>
-              <a:t>①  Triggered on clock-in success only.</a:t>
+              <a:t>①  "&lt;Q06&gt;"</a:t>
             </a:r>
           </a:p>
         </p:txBody>
@@ -3937,8 +3936,8 @@
         </p:nvSpPr>
         <p:spPr>
           <a:xfrm>
-            <a:off x="7100000" y="2800000"/>
-            <a:ext cx="4200000" cy="1100000"/>
+            <a:off x="800000" y="6100000"/>
+            <a:ext cx="10500000" cy="300000"/>
           </a:xfrm>
           <a:prstGeom prst="rect">
             <a:avLst/>
@@ -3953,13 +3952,13 @@
           <a:p>
             <a:pPr algn="l"/>
             <a:r>
-              <a:rPr sz="1600" b="0">
-                <a:solidFill>
-                  <a:srgbClr val="1A1714"/>
+              <a:rPr sz="1100" b="0">
+                <a:solidFill>
+                  <a:srgbClr val="8B6B22"/>
                 </a:solidFill>
                 <a:latin typeface="DM Sans"/>
               </a:rPr>
-              <a:t>②  Gold particles, short duration.</a:t>
+              <a:t>Designer quote, in-context.</a:t>
             </a:r>
           </a:p>
         </p:txBody>
@@ -3972,8 +3971,8 @@
         </p:nvSpPr>
         <p:spPr>
           <a:xfrm>
-            <a:off x="7100000" y="4100000"/>
-            <a:ext cx="4200000" cy="1100000"/>
+            <a:off x="8000000" y="6500000"/>
+            <a:ext cx="4000000" cy="300000"/>
           </a:xfrm>
           <a:prstGeom prst="rect">
             <a:avLst/>
@@ -3986,85 +3985,15 @@
           </a:bodyPr>
           <a:lstStyle/>
           <a:p>
-            <a:pPr algn="l"/>
-            <a:r>
-              <a:rPr sz="1600" b="0">
-                <a:solidFill>
-                  <a:srgbClr val="1A1714"/>
+            <a:pPr algn="r"/>
+            <a:r>
+              <a:rPr sz="1100" b="0">
+                <a:solidFill>
+                  <a:srgbClr val="D8CFBE"/>
                 </a:solidFill>
                 <a:latin typeface="DM Sans"/>
               </a:rPr>
-              <a:t>③  Disabled when reduced motion is on.</a:t>
-            </a:r>
-          </a:p>
-        </p:txBody>
-      </p:sp>
-      <p:sp>
-        <p:nvSpPr>
-          <p:cNvPr id="7" name="TextBox 6"/>
-          <p:cNvSpPr txBox="1"/>
-          <p:nvPr/>
-        </p:nvSpPr>
-        <p:spPr>
-          <a:xfrm>
-            <a:off x="800000" y="6100000"/>
-            <a:ext cx="10500000" cy="300000"/>
-          </a:xfrm>
-          <a:prstGeom prst="rect">
-            <a:avLst/>
-          </a:prstGeom>
-          <a:noFill/>
-        </p:spPr>
-        <p:txBody>
-          <a:bodyPr wrap="square">
-            <a:spAutoFit/>
-          </a:bodyPr>
-          <a:lstStyle/>
-          <a:p>
-            <a:pPr algn="l"/>
-            <a:r>
-              <a:rPr sz="1100" b="0">
-                <a:solidFill>
-                  <a:srgbClr val="8B6B22"/>
-                </a:solidFill>
-                <a:latin typeface="DM Sans"/>
-              </a:rPr>
-              <a:t>Clock page, post-success.</a:t>
-            </a:r>
-          </a:p>
-        </p:txBody>
-      </p:sp>
-      <p:sp>
-        <p:nvSpPr>
-          <p:cNvPr id="8" name="TextBox 7"/>
-          <p:cNvSpPr txBox="1"/>
-          <p:nvPr/>
-        </p:nvSpPr>
-        <p:spPr>
-          <a:xfrm>
-            <a:off x="8000000" y="6500000"/>
-            <a:ext cx="4000000" cy="300000"/>
-          </a:xfrm>
-          <a:prstGeom prst="rect">
-            <a:avLst/>
-          </a:prstGeom>
-          <a:noFill/>
-        </p:spPr>
-        <p:txBody>
-          <a:bodyPr wrap="square">
-            <a:spAutoFit/>
-          </a:bodyPr>
-          <a:lstStyle/>
-          <a:p>
-            <a:pPr algn="r"/>
-            <a:r>
-              <a:rPr sz="1100" b="0">
-                <a:solidFill>
-                  <a:srgbClr val="D8CFBE"/>
-                </a:solidFill>
-                <a:latin typeface="DM Sans"/>
-              </a:rPr>
-              <a:t>08 · Kente Executive Design · 12/16</a:t>
+              <a:t>08 · Kente Executive Design · 12/15</a:t>
             </a:r>
           </a:p>
         </p:txBody>
@@ -4103,8 +4032,8 @@
         </p:nvSpPr>
         <p:spPr>
           <a:xfrm>
-            <a:off x="800000" y="500000"/>
-            <a:ext cx="10500000" cy="700000"/>
+            <a:off x="1200000" y="2200000"/>
+            <a:ext cx="9700000" cy="1500000"/>
           </a:xfrm>
           <a:prstGeom prst="rect">
             <a:avLst/>
@@ -4117,73 +4046,43 @@
           </a:bodyPr>
           <a:lstStyle/>
           <a:p>
-            <a:pPr algn="l"/>
-            <a:r>
-              <a:rPr sz="3200" b="1">
+            <a:pPr algn="ctr"/>
+            <a:r>
+              <a:rPr sz="4400" b="1">
                 <a:solidFill>
                   <a:srgbClr val="0E1411"/>
                 </a:solidFill>
-                <a:latin typeface="DM Sans"/>
+                <a:latin typeface="Playfair Display"/>
               </a:rPr>
-              <a:t>One sentence from the designer</a:t>
-            </a:r>
-          </a:p>
-        </p:txBody>
-      </p:sp>
-      <p:sp>
-        <p:nvSpPr>
-          <p:cNvPr id="3" name="Rectangle 2"/>
-          <p:cNvSpPr/>
-          <p:nvPr/>
-        </p:nvSpPr>
-        <p:spPr>
-          <a:xfrm>
-            <a:off x="800000" y="1500000"/>
-            <a:ext cx="5800000" cy="4500000"/>
-          </a:xfrm>
-          <a:prstGeom prst="rect">
-            <a:avLst/>
-          </a:prstGeom>
-          <a:solidFill>
-            <a:srgbClr val="FBF7EF"/>
-          </a:solidFill>
-          <a:ln>
-            <a:solidFill>
-              <a:srgbClr val="D8CFBE"/>
-            </a:solidFill>
-          </a:ln>
-        </p:spPr>
-        <p:style>
-          <a:lnRef idx="1">
-            <a:schemeClr val="accent1"/>
-          </a:lnRef>
-          <a:fillRef idx="3">
-            <a:schemeClr val="accent1"/>
-          </a:fillRef>
-          <a:effectRef idx="2">
-            <a:schemeClr val="accent1"/>
-          </a:effectRef>
-          <a:fontRef idx="minor">
-            <a:schemeClr val="lt1"/>
-          </a:fontRef>
-        </p:style>
-        <p:txBody>
-          <a:bodyPr rtlCol="0" anchor="ctr"/>
-          <a:lstStyle/>
-          <a:p>
-            <a:pPr algn="ctr"/>
-            <a:r>
-              <a:rPr sz="1100">
-                <a:solidFill>
-                  <a:srgbClr val="8B6B22"/>
-                </a:solidFill>
-                <a:latin typeface="DM Sans"/>
-              </a:rPr>
-              <a:t>[REPLACE: S25-clock-page-hero.png]</a:t>
-            </a:r>
-          </a:p>
-        </p:txBody>
-      </p:sp>
+              <a:t>The design is the audit trail.</a:t>
+            </a:r>
+          </a:p>
+        </p:txBody>
+      </p:sp>
+      <p:pic>
+        <p:nvPicPr>
+          <p:cNvPr id="3" name="Picture 2" descr="gold-deco-hairline.png"/>
+          <p:cNvPicPr>
+            <a:picLocks noChangeAspect="1"/>
+          </p:cNvPicPr>
+          <p:nvPr/>
+        </p:nvPicPr>
+        <p:blipFill>
+          <a:blip r:embed="rId2"/>
+          <a:stretch>
+            <a:fillRect/>
+          </a:stretch>
+        </p:blipFill>
+        <p:spPr>
+          <a:xfrm>
+            <a:off x="5896000" y="3800000"/>
+            <a:ext cx="400000" cy="20000"/>
+          </a:xfrm>
+          <a:prstGeom prst="rect">
+            <a:avLst/>
+          </a:prstGeom>
+        </p:spPr>
+      </p:pic>
       <p:sp>
         <p:nvSpPr>
           <p:cNvPr id="4" name="TextBox 3"/>
@@ -4192,8 +4091,8 @@
         </p:nvSpPr>
         <p:spPr>
           <a:xfrm>
-            <a:off x="7100000" y="1500000"/>
-            <a:ext cx="4200000" cy="1100000"/>
+            <a:off x="1500000" y="4100000"/>
+            <a:ext cx="9100000" cy="1200000"/>
           </a:xfrm>
           <a:prstGeom prst="rect">
             <a:avLst/>
@@ -4206,15 +4105,15 @@
           </a:bodyPr>
           <a:lstStyle/>
           <a:p>
-            <a:pPr algn="l"/>
-            <a:r>
-              <a:rPr sz="1600" b="0">
+            <a:pPr algn="ctr"/>
+            <a:r>
+              <a:rPr sz="2200" b="0">
                 <a:solidFill>
                   <a:srgbClr val="1A1714"/>
                 </a:solidFill>
                 <a:latin typeface="DM Sans"/>
               </a:rPr>
-              <a:t>①  "&lt;Q06&gt;"</a:t>
+              <a:t>Every visual decision is specced, planned, and executed in `docs/superpowers/`.</a:t>
             </a:r>
           </a:p>
         </p:txBody>
@@ -4227,8 +4126,8 @@
         </p:nvSpPr>
         <p:spPr>
           <a:xfrm>
-            <a:off x="800000" y="6100000"/>
-            <a:ext cx="10500000" cy="300000"/>
+            <a:off x="8000000" y="6500000"/>
+            <a:ext cx="4000000" cy="300000"/>
           </a:xfrm>
           <a:prstGeom prst="rect">
             <a:avLst/>
@@ -4241,50 +4140,15 @@
           </a:bodyPr>
           <a:lstStyle/>
           <a:p>
-            <a:pPr algn="l"/>
+            <a:pPr algn="r"/>
             <a:r>
               <a:rPr sz="1100" b="0">
                 <a:solidFill>
-                  <a:srgbClr val="8B6B22"/>
+                  <a:srgbClr val="D8CFBE"/>
                 </a:solidFill>
                 <a:latin typeface="DM Sans"/>
               </a:rPr>
-              <a:t>Designer quote, in-context.</a:t>
-            </a:r>
-          </a:p>
-        </p:txBody>
-      </p:sp>
-      <p:sp>
-        <p:nvSpPr>
-          <p:cNvPr id="6" name="TextBox 5"/>
-          <p:cNvSpPr txBox="1"/>
-          <p:nvPr/>
-        </p:nvSpPr>
-        <p:spPr>
-          <a:xfrm>
-            <a:off x="8000000" y="6500000"/>
-            <a:ext cx="4000000" cy="300000"/>
-          </a:xfrm>
-          <a:prstGeom prst="rect">
-            <a:avLst/>
-          </a:prstGeom>
-          <a:noFill/>
-        </p:spPr>
-        <p:txBody>
-          <a:bodyPr wrap="square">
-            <a:spAutoFit/>
-          </a:bodyPr>
-          <a:lstStyle/>
-          <a:p>
-            <a:pPr algn="r"/>
-            <a:r>
-              <a:rPr sz="1100" b="0">
-                <a:solidFill>
-                  <a:srgbClr val="D8CFBE"/>
-                </a:solidFill>
-                <a:latin typeface="DM Sans"/>
-              </a:rPr>
-              <a:t>08 · Kente Executive Design · 13/16</a:t>
+              <a:t>08 · Kente Executive Design · 13/15</a:t>
             </a:r>
           </a:p>
         </p:txBody>
@@ -4298,161 +4162,6 @@
 </file>
 
 <file path=ppt/slides/slide14.xml><?xml version="1.0" encoding="utf-8"?>
-<p:sld xmlns:a="http://schemas.openxmlformats.org/drawingml/2006/main" xmlns:p="http://schemas.openxmlformats.org/presentationml/2006/main" xmlns:r="http://schemas.openxmlformats.org/officeDocument/2006/relationships">
-  <p:cSld>
-    <p:bg>
-      <p:bgPr>
-        <a:solidFill>
-          <a:srgbClr val="F6F1E7"/>
-        </a:solidFill>
-        <a:effectLst/>
-      </p:bgPr>
-    </p:bg>
-    <p:spTree>
-      <p:nvGrpSpPr>
-        <p:cNvPr id="1" name=""/>
-        <p:cNvGrpSpPr/>
-        <p:nvPr/>
-      </p:nvGrpSpPr>
-      <p:grpSpPr/>
-      <p:sp>
-        <p:nvSpPr>
-          <p:cNvPr id="2" name="TextBox 1"/>
-          <p:cNvSpPr txBox="1"/>
-          <p:nvPr/>
-        </p:nvSpPr>
-        <p:spPr>
-          <a:xfrm>
-            <a:off x="1200000" y="2200000"/>
-            <a:ext cx="9700000" cy="1500000"/>
-          </a:xfrm>
-          <a:prstGeom prst="rect">
-            <a:avLst/>
-          </a:prstGeom>
-          <a:noFill/>
-        </p:spPr>
-        <p:txBody>
-          <a:bodyPr wrap="square">
-            <a:spAutoFit/>
-          </a:bodyPr>
-          <a:lstStyle/>
-          <a:p>
-            <a:pPr algn="ctr"/>
-            <a:r>
-              <a:rPr sz="4400" b="1">
-                <a:solidFill>
-                  <a:srgbClr val="0E1411"/>
-                </a:solidFill>
-                <a:latin typeface="Playfair Display"/>
-              </a:rPr>
-              <a:t>The design is the audit trail.</a:t>
-            </a:r>
-          </a:p>
-        </p:txBody>
-      </p:sp>
-      <p:pic>
-        <p:nvPicPr>
-          <p:cNvPr id="3" name="Picture 2" descr="gold-deco-hairline.png"/>
-          <p:cNvPicPr>
-            <a:picLocks noChangeAspect="1"/>
-          </p:cNvPicPr>
-          <p:nvPr/>
-        </p:nvPicPr>
-        <p:blipFill>
-          <a:blip r:embed="rId2"/>
-          <a:stretch>
-            <a:fillRect/>
-          </a:stretch>
-        </p:blipFill>
-        <p:spPr>
-          <a:xfrm>
-            <a:off x="5896000" y="3800000"/>
-            <a:ext cx="400000" cy="20000"/>
-          </a:xfrm>
-          <a:prstGeom prst="rect">
-            <a:avLst/>
-          </a:prstGeom>
-        </p:spPr>
-      </p:pic>
-      <p:sp>
-        <p:nvSpPr>
-          <p:cNvPr id="4" name="TextBox 3"/>
-          <p:cNvSpPr txBox="1"/>
-          <p:nvPr/>
-        </p:nvSpPr>
-        <p:spPr>
-          <a:xfrm>
-            <a:off x="1500000" y="4100000"/>
-            <a:ext cx="9100000" cy="1200000"/>
-          </a:xfrm>
-          <a:prstGeom prst="rect">
-            <a:avLst/>
-          </a:prstGeom>
-          <a:noFill/>
-        </p:spPr>
-        <p:txBody>
-          <a:bodyPr wrap="square">
-            <a:spAutoFit/>
-          </a:bodyPr>
-          <a:lstStyle/>
-          <a:p>
-            <a:pPr algn="ctr"/>
-            <a:r>
-              <a:rPr sz="2200" b="0">
-                <a:solidFill>
-                  <a:srgbClr val="1A1714"/>
-                </a:solidFill>
-                <a:latin typeface="DM Sans"/>
-              </a:rPr>
-              <a:t>Every visual decision is specced, planned, and executed in `docs/superpowers/`.</a:t>
-            </a:r>
-          </a:p>
-        </p:txBody>
-      </p:sp>
-      <p:sp>
-        <p:nvSpPr>
-          <p:cNvPr id="5" name="TextBox 4"/>
-          <p:cNvSpPr txBox="1"/>
-          <p:nvPr/>
-        </p:nvSpPr>
-        <p:spPr>
-          <a:xfrm>
-            <a:off x="8000000" y="6500000"/>
-            <a:ext cx="4000000" cy="300000"/>
-          </a:xfrm>
-          <a:prstGeom prst="rect">
-            <a:avLst/>
-          </a:prstGeom>
-          <a:noFill/>
-        </p:spPr>
-        <p:txBody>
-          <a:bodyPr wrap="square">
-            <a:spAutoFit/>
-          </a:bodyPr>
-          <a:lstStyle/>
-          <a:p>
-            <a:pPr algn="r"/>
-            <a:r>
-              <a:rPr sz="1100" b="0">
-                <a:solidFill>
-                  <a:srgbClr val="D8CFBE"/>
-                </a:solidFill>
-                <a:latin typeface="DM Sans"/>
-              </a:rPr>
-              <a:t>08 · Kente Executive Design · 14/16</a:t>
-            </a:r>
-          </a:p>
-        </p:txBody>
-      </p:sp>
-    </p:spTree>
-  </p:cSld>
-  <p:clrMapOvr>
-    <a:masterClrMapping/>
-  </p:clrMapOvr>
-</p:sld>
-</file>
-
-<file path=ppt/slides/slide15.xml><?xml version="1.0" encoding="utf-8"?>
 <p:sld xmlns:a="http://schemas.openxmlformats.org/drawingml/2006/main" xmlns:p="http://schemas.openxmlformats.org/presentationml/2006/main" xmlns:r="http://schemas.openxmlformats.org/officeDocument/2006/relationships">
   <p:cSld>
     <p:bg>
@@ -4537,7 +4246,7 @@
 </p:sld>
 </file>
 
-<file path=ppt/slides/slide16.xml><?xml version="1.0" encoding="utf-8"?>
+<file path=ppt/slides/slide15.xml><?xml version="1.0" encoding="utf-8"?>
 <p:sld xmlns:a="http://schemas.openxmlformats.org/drawingml/2006/main" xmlns:p="http://schemas.openxmlformats.org/presentationml/2006/main" xmlns:r="http://schemas.openxmlformats.org/officeDocument/2006/relationships">
   <p:cSld>
     <p:bg>
@@ -4865,7 +4574,7 @@
                 </a:solidFill>
                 <a:latin typeface="DM Sans"/>
               </a:rPr>
-              <a:t>08 · Kente Executive Design · 16/16</a:t>
+              <a:t>08 · Kente Executive Design · 15/15</a:t>
             </a:r>
           </a:p>
         </p:txBody>
@@ -5046,7 +4755,7 @@
                 </a:solidFill>
                 <a:latin typeface="DM Sans"/>
               </a:rPr>
-              <a:t>08 · Kente Executive Design · 03/16</a:t>
+              <a:t>08 · Kente Executive Design · 03/15</a:t>
             </a:r>
           </a:p>
         </p:txBody>
@@ -5201,7 +4910,7 @@
                 </a:solidFill>
                 <a:latin typeface="DM Sans"/>
               </a:rPr>
-              <a:t>08 · Kente Executive Design · 04/16</a:t>
+              <a:t>08 · Kente Executive Design · 04/15</a:t>
             </a:r>
           </a:p>
         </p:txBody>
@@ -5356,7 +5065,7 @@
                 </a:solidFill>
                 <a:latin typeface="DM Sans"/>
               </a:rPr>
-              <a:t>08 · Kente Executive Design · 05/16</a:t>
+              <a:t>08 · Kente Executive Design · 05/15</a:t>
             </a:r>
           </a:p>
         </p:txBody>
@@ -5646,7 +5355,7 @@
                 </a:solidFill>
                 <a:latin typeface="DM Sans"/>
               </a:rPr>
-              <a:t>08 · Kente Executive Design · 06/16</a:t>
+              <a:t>08 · Kente Executive Design · 06/15</a:t>
             </a:r>
           </a:p>
         </p:txBody>
@@ -5801,7 +5510,7 @@
                 </a:solidFill>
                 <a:latin typeface="DM Sans"/>
               </a:rPr>
-              <a:t>08 · Kente Executive Design · 07/16</a:t>
+              <a:t>08 · Kente Executive Design · 07/15</a:t>
             </a:r>
           </a:p>
         </p:txBody>
@@ -5862,7 +5571,7 @@
                 </a:solidFill>
                 <a:latin typeface="Playfair Display"/>
               </a:rPr>
-              <a:t>Gold is the signature.</a:t>
+              <a:t>Kente is the anchor.</a:t>
             </a:r>
           </a:p>
         </p:txBody>
@@ -5921,7 +5630,7 @@
                 </a:solidFill>
                 <a:latin typeface="DM Sans"/>
               </a:rPr>
-              <a:t>One colour — #C9A14A — connects every deck, every screen, every page.</a:t>
+              <a:t>A 12px accent strip on every body slide. Different pattern per tier. Always present.</a:t>
             </a:r>
           </a:p>
         </p:txBody>
@@ -5956,7 +5665,7 @@
                 </a:solidFill>
                 <a:latin typeface="DM Sans"/>
               </a:rPr>
-              <a:t>08 · Kente Executive Design · 08/16</a:t>
+              <a:t>08 · Kente Executive Design · 08/15</a:t>
             </a:r>
           </a:p>
         </p:txBody>
@@ -5995,8 +5704,8 @@
         </p:nvSpPr>
         <p:spPr>
           <a:xfrm>
-            <a:off x="1200000" y="2200000"/>
-            <a:ext cx="9700000" cy="1500000"/>
+            <a:off x="800000" y="500000"/>
+            <a:ext cx="10500000" cy="700000"/>
           </a:xfrm>
           <a:prstGeom prst="rect">
             <a:avLst/>
@@ -6009,43 +5718,73 @@
           </a:bodyPr>
           <a:lstStyle/>
           <a:p>
+            <a:pPr algn="l"/>
+            <a:r>
+              <a:rPr sz="3200" b="1">
+                <a:solidFill>
+                  <a:srgbClr val="0E1411"/>
+                </a:solidFill>
+                <a:latin typeface="DM Sans"/>
+              </a:rPr>
+              <a:t>Distinct PWA icons — the same idea on a phone</a:t>
+            </a:r>
+          </a:p>
+        </p:txBody>
+      </p:sp>
+      <p:sp>
+        <p:nvSpPr>
+          <p:cNvPr id="3" name="Rectangle 2"/>
+          <p:cNvSpPr/>
+          <p:nvPr/>
+        </p:nvSpPr>
+        <p:spPr>
+          <a:xfrm>
+            <a:off x="800000" y="1500000"/>
+            <a:ext cx="5800000" cy="4500000"/>
+          </a:xfrm>
+          <a:prstGeom prst="rect">
+            <a:avLst/>
+          </a:prstGeom>
+          <a:solidFill>
+            <a:srgbClr val="FBF7EF"/>
+          </a:solidFill>
+          <a:ln>
+            <a:solidFill>
+              <a:srgbClr val="D8CFBE"/>
+            </a:solidFill>
+          </a:ln>
+        </p:spPr>
+        <p:style>
+          <a:lnRef idx="1">
+            <a:schemeClr val="accent1"/>
+          </a:lnRef>
+          <a:fillRef idx="3">
+            <a:schemeClr val="accent1"/>
+          </a:fillRef>
+          <a:effectRef idx="2">
+            <a:schemeClr val="accent1"/>
+          </a:effectRef>
+          <a:fontRef idx="minor">
+            <a:schemeClr val="lt1"/>
+          </a:fontRef>
+        </p:style>
+        <p:txBody>
+          <a:bodyPr rtlCol="0" anchor="ctr"/>
+          <a:lstStyle/>
+          <a:p>
             <a:pPr algn="ctr"/>
             <a:r>
-              <a:rPr sz="4400" b="1">
-                <a:solidFill>
-                  <a:srgbClr val="0E1411"/>
-                </a:solidFill>
-                <a:latin typeface="Playfair Display"/>
+              <a:rPr sz="1100">
+                <a:solidFill>
+                  <a:srgbClr val="8B6B22"/>
+                </a:solidFill>
+                <a:latin typeface="DM Sans"/>
               </a:rPr>
-              <a:t>Kente is the anchor.</a:t>
-            </a:r>
-          </a:p>
-        </p:txBody>
-      </p:sp>
-      <p:pic>
-        <p:nvPicPr>
-          <p:cNvPr id="3" name="Picture 2" descr="gold-deco-hairline.png"/>
-          <p:cNvPicPr>
-            <a:picLocks noChangeAspect="1"/>
-          </p:cNvPicPr>
-          <p:nvPr/>
-        </p:nvPicPr>
-        <p:blipFill>
-          <a:blip r:embed="rId2"/>
-          <a:stretch>
-            <a:fillRect/>
-          </a:stretch>
-        </p:blipFill>
-        <p:spPr>
-          <a:xfrm>
-            <a:off x="5896000" y="3800000"/>
-            <a:ext cx="400000" cy="20000"/>
-          </a:xfrm>
-          <a:prstGeom prst="rect">
-            <a:avLst/>
-          </a:prstGeom>
-        </p:spPr>
-      </p:pic>
+              <a:t>[REPLACE: S24-home-screen-icons.png]</a:t>
+            </a:r>
+          </a:p>
+        </p:txBody>
+      </p:sp>
       <p:sp>
         <p:nvSpPr>
           <p:cNvPr id="4" name="TextBox 3"/>
@@ -6054,8 +5793,8 @@
         </p:nvSpPr>
         <p:spPr>
           <a:xfrm>
-            <a:off x="1500000" y="4100000"/>
-            <a:ext cx="9100000" cy="1200000"/>
+            <a:off x="7100000" y="1500000"/>
+            <a:ext cx="4200000" cy="1100000"/>
           </a:xfrm>
           <a:prstGeom prst="rect">
             <a:avLst/>
@@ -6068,15 +5807,15 @@
           </a:bodyPr>
           <a:lstStyle/>
           <a:p>
-            <a:pPr algn="ctr"/>
-            <a:r>
-              <a:rPr sz="2200" b="0">
+            <a:pPr algn="l"/>
+            <a:r>
+              <a:rPr sz="1600" b="0">
                 <a:solidFill>
                   <a:srgbClr val="1A1714"/>
                 </a:solidFill>
                 <a:latin typeface="DM Sans"/>
               </a:rPr>
-              <a:t>A 12px accent strip on every body slide. Different pattern per tier. Always present.</a:t>
+              <a:t>①  Green clock badge for Staff Attendance.</a:t>
             </a:r>
           </a:p>
         </p:txBody>
@@ -6089,8 +5828,8 @@
         </p:nvSpPr>
         <p:spPr>
           <a:xfrm>
-            <a:off x="8000000" y="6500000"/>
-            <a:ext cx="4000000" cy="300000"/>
+            <a:off x="7100000" y="2800000"/>
+            <a:ext cx="4200000" cy="1100000"/>
           </a:xfrm>
           <a:prstGeom prst="rect">
             <a:avLst/>
@@ -6103,15 +5842,120 @@
           </a:bodyPr>
           <a:lstStyle/>
           <a:p>
-            <a:pPr algn="r"/>
-            <a:r>
-              <a:rPr sz="1100" b="0">
-                <a:solidFill>
-                  <a:srgbClr val="D8CFBE"/>
+            <a:pPr algn="l"/>
+            <a:r>
+              <a:rPr sz="1600" b="0">
+                <a:solidFill>
+                  <a:srgbClr val="1A1714"/>
                 </a:solidFill>
                 <a:latin typeface="DM Sans"/>
               </a:rPr>
-              <a:t>08 · Kente Executive Design · 09/16</a:t>
+              <a:t>②  Gold user-plus badge for SmartGate.</a:t>
+            </a:r>
+          </a:p>
+        </p:txBody>
+      </p:sp>
+      <p:sp>
+        <p:nvSpPr>
+          <p:cNvPr id="6" name="TextBox 5"/>
+          <p:cNvSpPr txBox="1"/>
+          <p:nvPr/>
+        </p:nvSpPr>
+        <p:spPr>
+          <a:xfrm>
+            <a:off x="7100000" y="4100000"/>
+            <a:ext cx="4200000" cy="1100000"/>
+          </a:xfrm>
+          <a:prstGeom prst="rect">
+            <a:avLst/>
+          </a:prstGeom>
+          <a:noFill/>
+        </p:spPr>
+        <p:txBody>
+          <a:bodyPr wrap="square">
+            <a:spAutoFit/>
+          </a:bodyPr>
+          <a:lstStyle/>
+          <a:p>
+            <a:pPr algn="l"/>
+            <a:r>
+              <a:rPr sz="1600" b="0">
+                <a:solidFill>
+                  <a:srgbClr val="1A1714"/>
+                </a:solidFill>
+                <a:latin typeface="DM Sans"/>
+              </a:rPr>
+              <a:t>③  The brand crosses from PPTX to home screen.</a:t>
+            </a:r>
+          </a:p>
+        </p:txBody>
+      </p:sp>
+      <p:sp>
+        <p:nvSpPr>
+          <p:cNvPr id="7" name="TextBox 6"/>
+          <p:cNvSpPr txBox="1"/>
+          <p:nvPr/>
+        </p:nvSpPr>
+        <p:spPr>
+          <a:xfrm>
+            <a:off x="800000" y="6100000"/>
+            <a:ext cx="10500000" cy="300000"/>
+          </a:xfrm>
+          <a:prstGeom prst="rect">
+            <a:avLst/>
+          </a:prstGeom>
+          <a:noFill/>
+        </p:spPr>
+        <p:txBody>
+          <a:bodyPr wrap="square">
+            <a:spAutoFit/>
+          </a:bodyPr>
+          <a:lstStyle/>
+          <a:p>
+            <a:pPr algn="l"/>
+            <a:r>
+              <a:rPr sz="1100" b="0">
+                <a:solidFill>
+                  <a:srgbClr val="8B6B22"/>
+                </a:solidFill>
+                <a:latin typeface="DM Sans"/>
+              </a:rPr>
+              <a:t>iOS home screen, both apps installed.</a:t>
+            </a:r>
+          </a:p>
+        </p:txBody>
+      </p:sp>
+      <p:sp>
+        <p:nvSpPr>
+          <p:cNvPr id="8" name="TextBox 7"/>
+          <p:cNvSpPr txBox="1"/>
+          <p:nvPr/>
+        </p:nvSpPr>
+        <p:spPr>
+          <a:xfrm>
+            <a:off x="8000000" y="6500000"/>
+            <a:ext cx="4000000" cy="300000"/>
+          </a:xfrm>
+          <a:prstGeom prst="rect">
+            <a:avLst/>
+          </a:prstGeom>
+          <a:noFill/>
+        </p:spPr>
+        <p:txBody>
+          <a:bodyPr wrap="square">
+            <a:spAutoFit/>
+          </a:bodyPr>
+          <a:lstStyle/>
+          <a:p>
+            <a:pPr algn="r"/>
+            <a:r>
+              <a:rPr sz="1100" b="0">
+                <a:solidFill>
+                  <a:srgbClr val="D8CFBE"/>
+                </a:solidFill>
+                <a:latin typeface="DM Sans"/>
+              </a:rPr>
+              <a:t>08 · Kente Executive Design · 09/15</a:t>
             </a:r>
           </a:p>
         </p:txBody>
